--- a/artifacts/speaking-portfolio-expanded/decks/product-engineering-15min-screen.pptx
+++ b/artifacts/speaking-portfolio-expanded/decks/product-engineering-15min-screen.pptx
@@ -15,6 +15,7 @@
     <p:sldId id="260" r:id="rIdSlide5"/>
     <p:sldId id="261" r:id="rIdSlide6"/>
     <p:sldId id="262" r:id="rIdSlide7"/>
+    <p:sldId id="263" r:id="rIdSlide8"/>
   </p:sldIdLst>
   <p:sldSz cx="13716000" cy="8572500" type="custom"/>
   <p:notesSz cx="6858000" cy="9144000"/>
@@ -672,7 +673,7 @@
                 <a:ea typeface="Arial"/>
                 <a:cs typeface="Arial"/>
               </a:rPr>
-              <a:t xml:space="preserve">Source slide 3. 01:30 to 03:30</a:t>
+              <a:t xml:space="preserve">Source slide 3. 01:30 to 03:00</a:t>
             </a:r>
             <a:endParaRPr lang="en-US" sz="1200"/>
           </a:p>
@@ -1199,7 +1200,7 @@
                 <a:ea typeface="Arial"/>
                 <a:cs typeface="Arial"/>
               </a:rPr>
-              <a:t xml:space="preserve">Source slide 5. 03:30 to 05:30</a:t>
+              <a:t xml:space="preserve">Source slide 5. 03:00 to 05:00</a:t>
             </a:r>
             <a:endParaRPr lang="en-US" sz="1200"/>
           </a:p>
@@ -1772,7 +1773,7 @@
                 <a:ea typeface="Arial"/>
                 <a:cs typeface="Arial"/>
               </a:rPr>
-              <a:t xml:space="preserve">Source slide 10. 05:30 to 07:00</a:t>
+              <a:t xml:space="preserve">Source slide 10. 05:00 to 06:30</a:t>
             </a:r>
             <a:endParaRPr lang="en-US" sz="1200"/>
           </a:p>
@@ -2299,7 +2300,7 @@
                 <a:ea typeface="Arial"/>
                 <a:cs typeface="Arial"/>
               </a:rPr>
-              <a:t xml:space="preserve">Source slide 11. 07:00 to 10:30</a:t>
+              <a:t xml:space="preserve">Source slide 11. 06:30 to 10:00</a:t>
             </a:r>
             <a:endParaRPr lang="en-US" sz="1200"/>
           </a:p>
@@ -2713,7 +2714,7 @@
                 <a:ea typeface="Arial"/>
                 <a:cs typeface="Arial"/>
               </a:rPr>
-              <a:t xml:space="preserve">Five minutes in the 40/30 routes, 3:30 in the 15. Begin with only this slide, never the answer-labelled kit. After the vote open the kit and map B to Pressure copy, C to Clearer first step. Follow economics-product/demo.md. Allow 45 seconds to write the rule.</a:t>
+              <a:t xml:space="preserve">Four and a half minutes in the 40/30 routes, 3:30 in the 15. Begin with only this slide, never the answer-labelled kit. After the vote open the kit and map B to Pressure copy, C to Clearer first step. Follow economics-product/demo.md. Allow 45 seconds to write the rule.</a:t>
             </a:r>
             <a:endParaRPr lang="en-US" sz="1200"/>
           </a:p>
@@ -2872,7 +2873,7 @@
                 <a:ea typeface="Arial"/>
                 <a:cs typeface="Arial"/>
               </a:rPr>
-              <a:t xml:space="preserve">Source slide 12. 10:30 to 13:00</a:t>
+              <a:t xml:space="preserve">Source slide 12. 10:00 to 11:30</a:t>
             </a:r>
             <a:endParaRPr lang="en-US" sz="1200"/>
           </a:p>
@@ -3102,145 +3103,145 @@
                 <a:ea typeface="Arial"/>
                 <a:cs typeface="Arial"/>
               </a:rPr>
-              <a:t xml:space="preserve">Then add the two missing from the old list. Sending a message to a real customer. Deleting their records. Those are consequences for another person, even when the API call costs a fraction of a cent. A person approves them. The system must enforce that permission, not merely mention it in the prompt.</a:t>
-            </a:r>
-            <a:endParaRPr lang="en-US" sz="1200"/>
-          </a:p>
-          <a:p>
-            <a:pPr marL="0" indent="0">
-              <a:lnSpc>
-                <a:spcPts val="1560"/>
-              </a:lnSpc>
-              <a:spcAft>
-                <a:spcPts val="0"/>
-              </a:spcAft>
-              <a:buNone/>
-            </a:pPr>
-            <a:r>
-              <a:rPr lang="en-US" sz="1200" b="0">
-                <a:solidFill>
-                  <a:srgbClr val="202b33"/>
-                </a:solidFill>
-                <a:latin typeface="Arial"/>
-                <a:ea typeface="Arial"/>
-                <a:cs typeface="Arial"/>
-              </a:rPr>
-              <a:t xml:space="preserve"/>
-            </a:r>
-            <a:endParaRPr lang="en-US" sz="1200"/>
-          </a:p>
-          <a:p>
-            <a:pPr marL="0" indent="0">
-              <a:lnSpc>
-                <a:spcPts val="1560"/>
-              </a:lnSpc>
-              <a:spcAft>
-                <a:spcPts val="0"/>
-              </a:spcAft>
-              <a:buNone/>
-            </a:pPr>
-            <a:r>
-              <a:rPr lang="en-US" sz="1200" b="0">
-                <a:solidFill>
-                  <a:srgbClr val="202b33"/>
-                </a:solidFill>
-                <a:latin typeface="Arial"/>
-                <a:ea typeface="Arial"/>
-                <a:cs typeface="Arial"/>
-              </a:rPr>
-              <a:t xml:space="preserve"/>
-            </a:r>
-            <a:endParaRPr lang="en-US" sz="1200"/>
-          </a:p>
-          <a:p>
-            <a:pPr marL="0" indent="0">
-              <a:lnSpc>
-                <a:spcPts val="1560"/>
-              </a:lnSpc>
-              <a:spcAft>
-                <a:spcPts val="0"/>
-              </a:spcAft>
-              <a:buNone/>
-            </a:pPr>
-            <a:r>
-              <a:rPr lang="en-US" sz="1200" b="0">
-                <a:solidFill>
-                  <a:srgbClr val="202b33"/>
-                </a:solidFill>
-                <a:latin typeface="Arial"/>
-                <a:ea typeface="Arial"/>
-                <a:cs typeface="Arial"/>
-              </a:rPr>
-              <a:t xml:space="preserve"/>
-            </a:r>
-            <a:endParaRPr lang="en-US" sz="1200"/>
-          </a:p>
-          <a:p>
-            <a:pPr marL="0" indent="0">
-              <a:lnSpc>
-                <a:spcPts val="1560"/>
-              </a:lnSpc>
-              <a:spcAft>
-                <a:spcPts val="0"/>
-              </a:spcAft>
-              <a:buNone/>
-            </a:pPr>
-            <a:r>
-              <a:rPr lang="en-US" sz="1200" b="0">
-                <a:solidFill>
-                  <a:srgbClr val="202b33"/>
-                </a:solidFill>
-                <a:latin typeface="Arial"/>
-                <a:ea typeface="Arial"/>
-                <a:cs typeface="Arial"/>
-              </a:rPr>
-              <a:t xml:space="preserve"/>
-            </a:r>
-            <a:endParaRPr lang="en-US" sz="1200"/>
-          </a:p>
-          <a:p>
-            <a:pPr marL="0" indent="0">
-              <a:lnSpc>
-                <a:spcPts val="1560"/>
-              </a:lnSpc>
-              <a:spcAft>
-                <a:spcPts val="0"/>
-              </a:spcAft>
-              <a:buNone/>
-            </a:pPr>
-            <a:r>
-              <a:rPr lang="en-US" sz="1200" b="0">
-                <a:solidFill>
-                  <a:srgbClr val="202b33"/>
-                </a:solidFill>
-                <a:latin typeface="Arial"/>
-                <a:ea typeface="Arial"/>
-                <a:cs typeface="Arial"/>
-              </a:rPr>
-              <a:t xml:space="preserve"/>
-            </a:r>
-            <a:endParaRPr lang="en-US" sz="1200"/>
-          </a:p>
-          <a:p>
-            <a:pPr marL="0" indent="0">
-              <a:lnSpc>
-                <a:spcPts val="1560"/>
-              </a:lnSpc>
-              <a:spcAft>
-                <a:spcPts val="0"/>
-              </a:spcAft>
-              <a:buNone/>
-            </a:pPr>
-            <a:r>
-              <a:rPr lang="en-US" sz="1200" b="0">
-                <a:solidFill>
-                  <a:srgbClr val="202b33"/>
-                </a:solidFill>
-                <a:latin typeface="Arial"/>
-                <a:ea typeface="Arial"/>
-                <a:cs typeface="Arial"/>
-              </a:rPr>
-              <a:t xml:space="preserve">Bridge: ownership consumes attention. Limit interfaces, reserve recovery practice, and attach a hypothesis and a report to each experiment.</a:t>
+              <a:t xml:space="preserve">Then add the two missing from the old list. Sending a message to a real customer. Deleting their records. Those are consequences for another person, even when the API call costs a fraction of a cent. A person approves them, and the system enforces that permission rather than mentioning it in a prompt.</a:t>
+            </a:r>
+            <a:endParaRPr lang="en-US" sz="1200"/>
+          </a:p>
+          <a:p>
+            <a:pPr marL="0" indent="0">
+              <a:lnSpc>
+                <a:spcPts val="1560"/>
+              </a:lnSpc>
+              <a:spcAft>
+                <a:spcPts val="0"/>
+              </a:spcAft>
+              <a:buNone/>
+            </a:pPr>
+            <a:r>
+              <a:rPr lang="en-US" sz="1200" b="0">
+                <a:solidFill>
+                  <a:srgbClr val="202b33"/>
+                </a:solidFill>
+                <a:latin typeface="Arial"/>
+                <a:ea typeface="Arial"/>
+                <a:cs typeface="Arial"/>
+              </a:rPr>
+              <a:t xml:space="preserve"/>
+            </a:r>
+            <a:endParaRPr lang="en-US" sz="1200"/>
+          </a:p>
+          <a:p>
+            <a:pPr marL="0" indent="0">
+              <a:lnSpc>
+                <a:spcPts val="1560"/>
+              </a:lnSpc>
+              <a:spcAft>
+                <a:spcPts val="0"/>
+              </a:spcAft>
+              <a:buNone/>
+            </a:pPr>
+            <a:r>
+              <a:rPr lang="en-US" sz="1200" b="0">
+                <a:solidFill>
+                  <a:srgbClr val="202b33"/>
+                </a:solidFill>
+                <a:latin typeface="Arial"/>
+                <a:ea typeface="Arial"/>
+                <a:cs typeface="Arial"/>
+              </a:rPr>
+              <a:t xml:space="preserve"/>
+            </a:r>
+            <a:endParaRPr lang="en-US" sz="1200"/>
+          </a:p>
+          <a:p>
+            <a:pPr marL="0" indent="0">
+              <a:lnSpc>
+                <a:spcPts val="1560"/>
+              </a:lnSpc>
+              <a:spcAft>
+                <a:spcPts val="0"/>
+              </a:spcAft>
+              <a:buNone/>
+            </a:pPr>
+            <a:r>
+              <a:rPr lang="en-US" sz="1200" b="0">
+                <a:solidFill>
+                  <a:srgbClr val="202b33"/>
+                </a:solidFill>
+                <a:latin typeface="Arial"/>
+                <a:ea typeface="Arial"/>
+                <a:cs typeface="Arial"/>
+              </a:rPr>
+              <a:t xml:space="preserve"/>
+            </a:r>
+            <a:endParaRPr lang="en-US" sz="1200"/>
+          </a:p>
+          <a:p>
+            <a:pPr marL="0" indent="0">
+              <a:lnSpc>
+                <a:spcPts val="1560"/>
+              </a:lnSpc>
+              <a:spcAft>
+                <a:spcPts val="0"/>
+              </a:spcAft>
+              <a:buNone/>
+            </a:pPr>
+            <a:r>
+              <a:rPr lang="en-US" sz="1200" b="0">
+                <a:solidFill>
+                  <a:srgbClr val="202b33"/>
+                </a:solidFill>
+                <a:latin typeface="Arial"/>
+                <a:ea typeface="Arial"/>
+                <a:cs typeface="Arial"/>
+              </a:rPr>
+              <a:t xml:space="preserve"/>
+            </a:r>
+            <a:endParaRPr lang="en-US" sz="1200"/>
+          </a:p>
+          <a:p>
+            <a:pPr marL="0" indent="0">
+              <a:lnSpc>
+                <a:spcPts val="1560"/>
+              </a:lnSpc>
+              <a:spcAft>
+                <a:spcPts val="0"/>
+              </a:spcAft>
+              <a:buNone/>
+            </a:pPr>
+            <a:r>
+              <a:rPr lang="en-US" sz="1200" b="0">
+                <a:solidFill>
+                  <a:srgbClr val="202b33"/>
+                </a:solidFill>
+                <a:latin typeface="Arial"/>
+                <a:ea typeface="Arial"/>
+                <a:cs typeface="Arial"/>
+              </a:rPr>
+              <a:t xml:space="preserve"/>
+            </a:r>
+            <a:endParaRPr lang="en-US" sz="1200"/>
+          </a:p>
+          <a:p>
+            <a:pPr marL="0" indent="0">
+              <a:lnSpc>
+                <a:spcPts val="1560"/>
+              </a:lnSpc>
+              <a:spcAft>
+                <a:spcPts val="0"/>
+              </a:spcAft>
+              <a:buNone/>
+            </a:pPr>
+            <a:r>
+              <a:rPr lang="en-US" sz="1200" b="0">
+                <a:solidFill>
+                  <a:srgbClr val="202b33"/>
+                </a:solidFill>
+                <a:latin typeface="Arial"/>
+                <a:ea typeface="Arial"/>
+                <a:cs typeface="Arial"/>
+              </a:rPr>
+              <a:t xml:space="preserve">Bridge: ownership consumes attention, and it is about to consume fuel; limit interfaces, reserve recovery practice, and put the ongoing token burn beside the latency budget.</a:t>
             </a:r>
             <a:endParaRPr lang="en-US" sz="1200"/>
           </a:p>
@@ -3353,7 +3354,534 @@
                 <a:ea typeface="Arial"/>
                 <a:cs typeface="Arial"/>
               </a:rPr>
-              <a:t xml:space="preserve">Source slide 15. 13:00 to 15:00</a:t>
+              <a:t xml:space="preserve">Source slide 15. 11:30 to 13:30</a:t>
+            </a:r>
+            <a:endParaRPr lang="en-US" sz="1200"/>
+          </a:p>
+          <a:p>
+            <a:pPr marL="0" indent="0">
+              <a:lnSpc>
+                <a:spcPts val="1560"/>
+              </a:lnSpc>
+              <a:spcAft>
+                <a:spcPts val="0"/>
+              </a:spcAft>
+              <a:buNone/>
+            </a:pPr>
+            <a:r>
+              <a:rPr lang="en-US" sz="1200" b="0">
+                <a:solidFill>
+                  <a:srgbClr val="202b33"/>
+                </a:solidFill>
+                <a:latin typeface="Arial"/>
+                <a:ea typeface="Arial"/>
+                <a:cs typeface="Arial"/>
+              </a:rPr>
+              <a:t xml:space="preserve"/>
+            </a:r>
+            <a:endParaRPr lang="en-US" sz="1200"/>
+          </a:p>
+          <a:p>
+            <a:pPr marL="0" indent="0">
+              <a:lnSpc>
+                <a:spcPts val="1560"/>
+              </a:lnSpc>
+              <a:spcAft>
+                <a:spcPts val="0"/>
+              </a:spcAft>
+              <a:buNone/>
+            </a:pPr>
+            <a:r>
+              <a:rPr lang="en-US" sz="1200" b="0">
+                <a:solidFill>
+                  <a:srgbClr val="202b33"/>
+                </a:solidFill>
+                <a:latin typeface="Arial"/>
+                <a:ea typeface="Arial"/>
+                <a:cs typeface="Arial"/>
+              </a:rPr>
+              <a:t xml:space="preserve">Generated UI, adapting in real time, per person</a:t>
+            </a:r>
+            <a:endParaRPr lang="en-US" sz="1200"/>
+          </a:p>
+          <a:p>
+            <a:pPr marL="0" indent="0">
+              <a:lnSpc>
+                <a:spcPts val="1560"/>
+              </a:lnSpc>
+              <a:spcAft>
+                <a:spcPts val="0"/>
+              </a:spcAft>
+              <a:buNone/>
+            </a:pPr>
+            <a:r>
+              <a:rPr lang="en-US" sz="1200" b="0">
+                <a:solidFill>
+                  <a:srgbClr val="202b33"/>
+                </a:solidFill>
+                <a:latin typeface="Arial"/>
+                <a:ea typeface="Arial"/>
+                <a:cs typeface="Arial"/>
+              </a:rPr>
+              <a:t xml:space="preserve"/>
+            </a:r>
+            <a:endParaRPr lang="en-US" sz="1200"/>
+          </a:p>
+          <a:p>
+            <a:pPr marL="0" indent="0">
+              <a:lnSpc>
+                <a:spcPts val="1560"/>
+              </a:lnSpc>
+              <a:spcAft>
+                <a:spcPts val="0"/>
+              </a:spcAft>
+              <a:buNone/>
+            </a:pPr>
+            <a:r>
+              <a:rPr lang="en-US" sz="1200" b="0">
+                <a:solidFill>
+                  <a:srgbClr val="202b33"/>
+                </a:solidFill>
+                <a:latin typeface="Arial"/>
+                <a:ea typeface="Arial"/>
+                <a:cs typeface="Arial"/>
+              </a:rPr>
+              <a:t xml:space="preserve">Yes, the software you mastered is going away. As you know it.</a:t>
+            </a:r>
+            <a:endParaRPr lang="en-US" sz="1200"/>
+          </a:p>
+          <a:p>
+            <a:pPr marL="0" indent="0">
+              <a:lnSpc>
+                <a:spcPts val="1560"/>
+              </a:lnSpc>
+              <a:spcAft>
+                <a:spcPts val="0"/>
+              </a:spcAft>
+              <a:buNone/>
+            </a:pPr>
+            <a:r>
+              <a:rPr lang="en-US" sz="1200" b="0">
+                <a:solidFill>
+                  <a:srgbClr val="202b33"/>
+                </a:solidFill>
+                <a:latin typeface="Arial"/>
+                <a:ea typeface="Arial"/>
+                <a:cs typeface="Arial"/>
+              </a:rPr>
+              <a:t xml:space="preserve"/>
+            </a:r>
+            <a:endParaRPr lang="en-US" sz="1200"/>
+          </a:p>
+          <a:p>
+            <a:pPr marL="0" indent="0">
+              <a:lnSpc>
+                <a:spcPts val="1560"/>
+              </a:lnSpc>
+              <a:spcAft>
+                <a:spcPts val="0"/>
+              </a:spcAft>
+              <a:buNone/>
+            </a:pPr>
+            <a:r>
+              <a:rPr lang="en-US" sz="1200" b="0">
+                <a:solidFill>
+                  <a:srgbClr val="202b33"/>
+                </a:solidFill>
+                <a:latin typeface="Arial"/>
+                <a:ea typeface="Arial"/>
+                <a:cs typeface="Arial"/>
+              </a:rPr>
+              <a:t xml:space="preserve">The channel is not spoken for.</a:t>
+            </a:r>
+            <a:endParaRPr lang="en-US" sz="1200"/>
+          </a:p>
+          <a:p>
+            <a:pPr marL="0" indent="0">
+              <a:lnSpc>
+                <a:spcPts val="1560"/>
+              </a:lnSpc>
+              <a:spcAft>
+                <a:spcPts val="0"/>
+              </a:spcAft>
+              <a:buNone/>
+            </a:pPr>
+            <a:r>
+              <a:rPr lang="en-US" sz="1200" b="0">
+                <a:solidFill>
+                  <a:srgbClr val="202b33"/>
+                </a:solidFill>
+                <a:latin typeface="Arial"/>
+                <a:ea typeface="Arial"/>
+                <a:cs typeface="Arial"/>
+              </a:rPr>
+              <a:t xml:space="preserve"/>
+            </a:r>
+            <a:endParaRPr lang="en-US" sz="1200"/>
+          </a:p>
+          <a:p>
+            <a:pPr marL="0" indent="0">
+              <a:lnSpc>
+                <a:spcPts val="1560"/>
+              </a:lnSpc>
+              <a:spcAft>
+                <a:spcPts val="0"/>
+              </a:spcAft>
+              <a:buNone/>
+            </a:pPr>
+            <a:r>
+              <a:rPr lang="en-US" sz="1200" b="0">
+                <a:solidFill>
+                  <a:srgbClr val="202b33"/>
+                </a:solidFill>
+                <a:latin typeface="Arial"/>
+                <a:ea typeface="Arial"/>
+                <a:cs typeface="Arial"/>
+              </a:rPr>
+              <a:t xml:space="preserve">Which raises the question this room should actually be arguing about. Should OpenAI and Anthropic end up owning every software channel? Watch what happens when the assistants ship real-time collaboration: who spends less time in email, Slack and Google Docs then? I can already make and edit images and video in ways that make me less likely to open Photoshop or DaVinci. If I need a jingle for the company, I ask Suno and it is done. So is everything you spent a lifetime learning, mastering and fighting with about to be irrelevant? Yes. At least as you know it.</a:t>
+            </a:r>
+            <a:endParaRPr lang="en-US" sz="1200"/>
+          </a:p>
+          <a:p>
+            <a:pPr marL="0" indent="0">
+              <a:lnSpc>
+                <a:spcPts val="1560"/>
+              </a:lnSpc>
+              <a:spcAft>
+                <a:spcPts val="0"/>
+              </a:spcAft>
+              <a:buNone/>
+            </a:pPr>
+            <a:r>
+              <a:rPr lang="en-US" sz="1200" b="0">
+                <a:solidFill>
+                  <a:srgbClr val="202b33"/>
+                </a:solidFill>
+                <a:latin typeface="Arial"/>
+                <a:ea typeface="Arial"/>
+                <a:cs typeface="Arial"/>
+              </a:rPr>
+              <a:t xml:space="preserve"/>
+            </a:r>
+            <a:endParaRPr lang="en-US" sz="1200"/>
+          </a:p>
+          <a:p>
+            <a:pPr marL="0" indent="0">
+              <a:lnSpc>
+                <a:spcPts val="1560"/>
+              </a:lnSpc>
+              <a:spcAft>
+                <a:spcPts val="0"/>
+              </a:spcAft>
+              <a:buNone/>
+            </a:pPr>
+            <a:r>
+              <a:rPr lang="en-US" sz="1200" b="0">
+                <a:solidFill>
+                  <a:srgbClr val="202b33"/>
+                </a:solidFill>
+                <a:latin typeface="Arial"/>
+                <a:ea typeface="Arial"/>
+                <a:cs typeface="Arial"/>
+              </a:rPr>
+              <a:t xml:space="preserve">What replaces it looks less like a grid of apps and more like Minority Report, with a surprise revival of the terminal. Which is a Matrix ending when you think about it. Thanks, AI. Skynet is not so bad if I get to keep my CLIs.</a:t>
+            </a:r>
+            <a:endParaRPr lang="en-US" sz="1200"/>
+          </a:p>
+          <a:p>
+            <a:pPr marL="0" indent="0">
+              <a:lnSpc>
+                <a:spcPts val="1560"/>
+              </a:lnSpc>
+              <a:spcAft>
+                <a:spcPts val="0"/>
+              </a:spcAft>
+              <a:buNone/>
+            </a:pPr>
+            <a:r>
+              <a:rPr lang="en-US" sz="1200" b="0">
+                <a:solidFill>
+                  <a:srgbClr val="202b33"/>
+                </a:solidFill>
+                <a:latin typeface="Arial"/>
+                <a:ea typeface="Arial"/>
+                <a:cs typeface="Arial"/>
+              </a:rPr>
+              <a:t xml:space="preserve"/>
+            </a:r>
+            <a:endParaRPr lang="en-US" sz="1200"/>
+          </a:p>
+          <a:p>
+            <a:pPr marL="0" indent="0">
+              <a:lnSpc>
+                <a:spcPts val="1560"/>
+              </a:lnSpc>
+              <a:spcAft>
+                <a:spcPts val="0"/>
+              </a:spcAft>
+              <a:buNone/>
+            </a:pPr>
+            <a:r>
+              <a:rPr lang="en-US" sz="1200" b="0">
+                <a:solidFill>
+                  <a:srgbClr val="202b33"/>
+                </a:solidFill>
+                <a:latin typeface="Arial"/>
+                <a:ea typeface="Arial"/>
+                <a:cs typeface="Arial"/>
+              </a:rPr>
+              <a:t xml:space="preserve">Here is the part I want you to leave with. That future is not spoken for. GPT image being pretty good does not mean the story of image creation belongs to the big players, and the same is true in whichever industry you work in. Those of us who do not work at a frontier lab, the organic agents in the room, get to rethink any and every app as an AI-native system from the boundary up. That is this whole talk one level higher: do not photocopy today's product categories onto tomorrow's substrate either.</a:t>
+            </a:r>
+            <a:endParaRPr lang="en-US" sz="1200"/>
+          </a:p>
+          <a:p>
+            <a:pPr marL="0" indent="0">
+              <a:lnSpc>
+                <a:spcPts val="1560"/>
+              </a:lnSpc>
+              <a:spcAft>
+                <a:spcPts val="0"/>
+              </a:spcAft>
+              <a:buNone/>
+            </a:pPr>
+            <a:r>
+              <a:rPr lang="en-US" sz="1200" b="0">
+                <a:solidFill>
+                  <a:srgbClr val="202b33"/>
+                </a:solidFill>
+                <a:latin typeface="Arial"/>
+                <a:ea typeface="Arial"/>
+                <a:cs typeface="Arial"/>
+              </a:rPr>
+              <a:t xml:space="preserve"/>
+            </a:r>
+            <a:endParaRPr lang="en-US" sz="1200"/>
+          </a:p>
+          <a:p>
+            <a:pPr marL="0" indent="0">
+              <a:lnSpc>
+                <a:spcPts val="1560"/>
+              </a:lnSpc>
+              <a:spcAft>
+                <a:spcPts val="0"/>
+              </a:spcAft>
+              <a:buNone/>
+            </a:pPr>
+            <a:r>
+              <a:rPr lang="en-US" sz="1200" b="0">
+                <a:solidFill>
+                  <a:srgbClr val="202b33"/>
+                </a:solidFill>
+                <a:latin typeface="Arial"/>
+                <a:ea typeface="Arial"/>
+                <a:cs typeface="Arial"/>
+              </a:rPr>
+              <a:t xml:space="preserve"/>
+            </a:r>
+            <a:endParaRPr lang="en-US" sz="1200"/>
+          </a:p>
+          <a:p>
+            <a:pPr marL="0" indent="0">
+              <a:lnSpc>
+                <a:spcPts val="1560"/>
+              </a:lnSpc>
+              <a:spcAft>
+                <a:spcPts val="0"/>
+              </a:spcAft>
+              <a:buNone/>
+            </a:pPr>
+            <a:r>
+              <a:rPr lang="en-US" sz="1200" b="0">
+                <a:solidFill>
+                  <a:srgbClr val="202b33"/>
+                </a:solidFill>
+                <a:latin typeface="Arial"/>
+                <a:ea typeface="Arial"/>
+                <a:cs typeface="Arial"/>
+              </a:rPr>
+              <a:t xml:space="preserve"/>
+            </a:r>
+            <a:endParaRPr lang="en-US" sz="1200"/>
+          </a:p>
+          <a:p>
+            <a:pPr marL="0" indent="0">
+              <a:lnSpc>
+                <a:spcPts val="1560"/>
+              </a:lnSpc>
+              <a:spcAft>
+                <a:spcPts val="0"/>
+              </a:spcAft>
+              <a:buNone/>
+            </a:pPr>
+            <a:r>
+              <a:rPr lang="en-US" sz="1200" b="0">
+                <a:solidFill>
+                  <a:srgbClr val="202b33"/>
+                </a:solidFill>
+                <a:latin typeface="Arial"/>
+                <a:ea typeface="Arial"/>
+                <a:cs typeface="Arial"/>
+              </a:rPr>
+              <a:t xml:space="preserve">Ask which product they use daily that would not survive somebody else rebuilding it AI-native. Take one answer. Do not resolve it.</a:t>
+            </a:r>
+            <a:endParaRPr lang="en-US" sz="1200"/>
+          </a:p>
+          <a:p>
+            <a:pPr marL="0" indent="0">
+              <a:lnSpc>
+                <a:spcPts val="1560"/>
+              </a:lnSpc>
+              <a:spcAft>
+                <a:spcPts val="0"/>
+              </a:spcAft>
+              <a:buNone/>
+            </a:pPr>
+            <a:r>
+              <a:rPr lang="en-US" sz="1200" b="0">
+                <a:solidFill>
+                  <a:srgbClr val="202b33"/>
+                </a:solidFill>
+                <a:latin typeface="Arial"/>
+                <a:ea typeface="Arial"/>
+                <a:cs typeface="Arial"/>
+              </a:rPr>
+              <a:t xml:space="preserve"/>
+            </a:r>
+            <a:endParaRPr lang="en-US" sz="1200"/>
+          </a:p>
+          <a:p>
+            <a:pPr marL="0" indent="0">
+              <a:lnSpc>
+                <a:spcPts val="1560"/>
+              </a:lnSpc>
+              <a:spcAft>
+                <a:spcPts val="0"/>
+              </a:spcAft>
+              <a:buNone/>
+            </a:pPr>
+            <a:r>
+              <a:rPr lang="en-US" sz="1200" b="0">
+                <a:solidFill>
+                  <a:srgbClr val="202b33"/>
+                </a:solidFill>
+                <a:latin typeface="Arial"/>
+                <a:ea typeface="Arial"/>
+                <a:cs typeface="Arial"/>
+              </a:rPr>
+              <a:t xml:space="preserve">Bridge: every experiment still reports its hypothesis, its exposure count and its owner.</a:t>
+            </a:r>
+            <a:endParaRPr lang="en-US" sz="1200"/>
+          </a:p>
+        </p:txBody>
+      </p:sp>
+    </p:spTree>
+  </p:cSld>
+  <p:clrMapOvr>
+    <a:masterClrMapping/>
+  </p:clrMapOvr>
+</p:notes>
+</file>
+
+<file path=ppt/notesSlides/notesSlide8.xml><?xml version="1.0" encoding="utf-8"?>
+<p:notes xmlns:a="http://schemas.openxmlformats.org/drawingml/2006/main" xmlns:r="http://schemas.openxmlformats.org/officeDocument/2006/relationships" xmlns:p="http://schemas.openxmlformats.org/presentationml/2006/main">
+  <p:cSld>
+    <p:spTree>
+      <p:nvGrpSpPr>
+        <p:cNvPr id="1" name=""/>
+        <p:cNvGrpSpPr/>
+        <p:nvPr/>
+      </p:nvGrpSpPr>
+      <p:grpSpPr>
+        <a:xfrm>
+          <a:off x="0" y="0"/>
+          <a:ext cx="0" cy="0"/>
+          <a:chOff x="0" y="0"/>
+          <a:chExt cx="0" cy="0"/>
+        </a:xfrm>
+      </p:grpSpPr>
+      <p:sp>
+        <p:nvSpPr>
+          <p:cNvPr id="2" name="Presenter notes"/>
+          <p:cNvSpPr txBox="1"/>
+          <p:nvPr>
+            <p:ph type="body" idx="1"/>
+          </p:nvPr>
+        </p:nvSpPr>
+        <p:spPr>
+          <a:xfrm>
+            <a:off x="457200" y="1428750"/>
+            <a:ext cx="5715000" cy="6667500"/>
+          </a:xfrm>
+        </p:spPr>
+        <p:txBody>
+          <a:bodyPr/>
+          <a:lstStyle/>
+          <a:p>
+            <a:pPr marL="0" indent="0">
+              <a:lnSpc>
+                <a:spcPts val="1560"/>
+              </a:lnSpc>
+              <a:spcAft>
+                <a:spcPts val="0"/>
+              </a:spcAft>
+              <a:buNone/>
+            </a:pPr>
+            <a:r>
+              <a:rPr lang="en-US" sz="1200" b="0">
+                <a:solidFill>
+                  <a:srgbClr val="202b33"/>
+                </a:solidFill>
+                <a:latin typeface="Arial"/>
+                <a:ea typeface="Arial"/>
+                <a:cs typeface="Arial"/>
+              </a:rPr>
+              <a:t xml:space="preserve">The Future of Product Engineering: Break the Mirror on Purpose</a:t>
+            </a:r>
+            <a:endParaRPr lang="en-US" sz="1200"/>
+          </a:p>
+          <a:p>
+            <a:pPr marL="0" indent="0">
+              <a:lnSpc>
+                <a:spcPts val="1560"/>
+              </a:lnSpc>
+              <a:spcAft>
+                <a:spcPts val="0"/>
+              </a:spcAft>
+              <a:buNone/>
+            </a:pPr>
+            <a:r>
+              <a:rPr lang="en-US" sz="1200" b="0">
+                <a:solidFill>
+                  <a:srgbClr val="202b33"/>
+                </a:solidFill>
+                <a:latin typeface="Arial"/>
+                <a:ea typeface="Arial"/>
+                <a:cs typeface="Arial"/>
+              </a:rPr>
+              <a:t xml:space="preserve"/>
+            </a:r>
+            <a:endParaRPr lang="en-US" sz="1200"/>
+          </a:p>
+          <a:p>
+            <a:pPr marL="0" indent="0">
+              <a:lnSpc>
+                <a:spcPts val="1560"/>
+              </a:lnSpc>
+              <a:spcAft>
+                <a:spcPts val="0"/>
+              </a:spcAft>
+              <a:buNone/>
+            </a:pPr>
+            <a:r>
+              <a:rPr lang="en-US" sz="1200" b="0">
+                <a:solidFill>
+                  <a:srgbClr val="202b33"/>
+                </a:solidFill>
+                <a:latin typeface="Arial"/>
+                <a:ea typeface="Arial"/>
+                <a:cs typeface="Arial"/>
+              </a:rPr>
+              <a:t xml:space="preserve">Source slide 17. 13:30 to 15:00</a:t>
             </a:r>
             <a:endParaRPr lang="en-US" sz="1200"/>
           </a:p>
@@ -3537,99 +4065,99 @@
                 <a:ea typeface="Arial"/>
                 <a:cs typeface="Arial"/>
               </a:rPr>
-              <a:t xml:space="preserve">Take one boundary. What arrives, what leaves, who decides, and what did it cost last week? Make collection cheaper without erasing the disagreement that the handoff used to expose. Keep the product review where the evidence conflicts. Give the resulting decision a durable artifact so the next agent does not have to guess.</a:t>
-            </a:r>
-            <a:endParaRPr lang="en-US" sz="1200"/>
-          </a:p>
-          <a:p>
-            <a:pPr marL="0" indent="0">
-              <a:lnSpc>
-                <a:spcPts val="1560"/>
-              </a:lnSpc>
-              <a:spcAft>
-                <a:spcPts val="0"/>
-              </a:spcAft>
-              <a:buNone/>
-            </a:pPr>
-            <a:r>
-              <a:rPr lang="en-US" sz="1200" b="0">
-                <a:solidFill>
-                  <a:srgbClr val="202b33"/>
-                </a:solidFill>
-                <a:latin typeface="Arial"/>
-                <a:ea typeface="Arial"/>
-                <a:cs typeface="Arial"/>
-              </a:rPr>
-              <a:t xml:space="preserve"/>
-            </a:r>
-            <a:endParaRPr lang="en-US" sz="1200"/>
-          </a:p>
-          <a:p>
-            <a:pPr marL="0" indent="0">
-              <a:lnSpc>
-                <a:spcPts val="1560"/>
-              </a:lnSpc>
-              <a:spcAft>
-                <a:spcPts val="0"/>
-              </a:spcAft>
-              <a:buNone/>
-            </a:pPr>
-            <a:r>
-              <a:rPr lang="en-US" sz="1200" b="0">
-                <a:solidFill>
-                  <a:srgbClr val="202b33"/>
-                </a:solidFill>
-                <a:latin typeface="Arial"/>
-                <a:ea typeface="Arial"/>
-                <a:cs typeface="Arial"/>
-              </a:rPr>
-              <a:t xml:space="preserve">Then price ownership. Six agents do not become free because one person has their names in a config file. Reserve the person's attention and practise the exceptional work. Put permission before customer consequences.</a:t>
-            </a:r>
-            <a:endParaRPr lang="en-US" sz="1200"/>
-          </a:p>
-          <a:p>
-            <a:pPr marL="0" indent="0">
-              <a:lnSpc>
-                <a:spcPts val="1560"/>
-              </a:lnSpc>
-              <a:spcAft>
-                <a:spcPts val="0"/>
-              </a:spcAft>
-              <a:buNone/>
-            </a:pPr>
-            <a:r>
-              <a:rPr lang="en-US" sz="1200" b="0">
-                <a:solidFill>
-                  <a:srgbClr val="202b33"/>
-                </a:solidFill>
-                <a:latin typeface="Arial"/>
-                <a:ea typeface="Arial"/>
-                <a:cs typeface="Arial"/>
-              </a:rPr>
-              <a:t xml:space="preserve"/>
-            </a:r>
-            <a:endParaRPr lang="en-US" sz="1200"/>
-          </a:p>
-          <a:p>
-            <a:pPr marL="0" indent="0">
-              <a:lnSpc>
-                <a:spcPts val="1560"/>
-              </a:lnSpc>
-              <a:spcAft>
-                <a:spcPts val="0"/>
-              </a:spcAft>
-              <a:buNone/>
-            </a:pPr>
-            <a:r>
-              <a:rPr lang="en-US" sz="1200" b="0">
-                <a:solidFill>
-                  <a:srgbClr val="202b33"/>
-                </a:solidFill>
-                <a:latin typeface="Arial"/>
-                <a:ea typeface="Arial"/>
-                <a:cs typeface="Arial"/>
-              </a:rPr>
-              <a:t xml:space="preserve">The org chart is a record of earlier tradeoffs. You are allowed to make new ones. Automate the right things. Keep the taste.</a:t>
+              <a:t xml:space="preserve">Take one boundary. What arrives, what leaves, who decides, and what did it cost last week? Make collection cheaper without erasing the disagreement the handoff used to expose. Keep the product review where the evidence conflicts, and give the decision a durable artifact so the next agent does not have to guess.</a:t>
+            </a:r>
+            <a:endParaRPr lang="en-US" sz="1200"/>
+          </a:p>
+          <a:p>
+            <a:pPr marL="0" indent="0">
+              <a:lnSpc>
+                <a:spcPts val="1560"/>
+              </a:lnSpc>
+              <a:spcAft>
+                <a:spcPts val="0"/>
+              </a:spcAft>
+              <a:buNone/>
+            </a:pPr>
+            <a:r>
+              <a:rPr lang="en-US" sz="1200" b="0">
+                <a:solidFill>
+                  <a:srgbClr val="202b33"/>
+                </a:solidFill>
+                <a:latin typeface="Arial"/>
+                <a:ea typeface="Arial"/>
+                <a:cs typeface="Arial"/>
+              </a:rPr>
+              <a:t xml:space="preserve"/>
+            </a:r>
+            <a:endParaRPr lang="en-US" sz="1200"/>
+          </a:p>
+          <a:p>
+            <a:pPr marL="0" indent="0">
+              <a:lnSpc>
+                <a:spcPts val="1560"/>
+              </a:lnSpc>
+              <a:spcAft>
+                <a:spcPts val="0"/>
+              </a:spcAft>
+              <a:buNone/>
+            </a:pPr>
+            <a:r>
+              <a:rPr lang="en-US" sz="1200" b="0">
+                <a:solidFill>
+                  <a:srgbClr val="202b33"/>
+                </a:solidFill>
+                <a:latin typeface="Arial"/>
+                <a:ea typeface="Arial"/>
+                <a:cs typeface="Arial"/>
+              </a:rPr>
+              <a:t xml:space="preserve">Then price ownership, and price the fuel. Six agents do not become free because one person has their names in a config file, and neither does the burn that keeps them running. Put permission before customer consequences.</a:t>
+            </a:r>
+            <a:endParaRPr lang="en-US" sz="1200"/>
+          </a:p>
+          <a:p>
+            <a:pPr marL="0" indent="0">
+              <a:lnSpc>
+                <a:spcPts val="1560"/>
+              </a:lnSpc>
+              <a:spcAft>
+                <a:spcPts val="0"/>
+              </a:spcAft>
+              <a:buNone/>
+            </a:pPr>
+            <a:r>
+              <a:rPr lang="en-US" sz="1200" b="0">
+                <a:solidFill>
+                  <a:srgbClr val="202b33"/>
+                </a:solidFill>
+                <a:latin typeface="Arial"/>
+                <a:ea typeface="Arial"/>
+                <a:cs typeface="Arial"/>
+              </a:rPr>
+              <a:t xml:space="preserve"/>
+            </a:r>
+            <a:endParaRPr lang="en-US" sz="1200"/>
+          </a:p>
+          <a:p>
+            <a:pPr marL="0" indent="0">
+              <a:lnSpc>
+                <a:spcPts val="1560"/>
+              </a:lnSpc>
+              <a:spcAft>
+                <a:spcPts val="0"/>
+              </a:spcAft>
+              <a:buNone/>
+            </a:pPr>
+            <a:r>
+              <a:rPr lang="en-US" sz="1200" b="0">
+                <a:solidFill>
+                  <a:srgbClr val="202b33"/>
+                </a:solidFill>
+                <a:latin typeface="Arial"/>
+                <a:ea typeface="Arial"/>
+                <a:cs typeface="Arial"/>
+              </a:rPr>
+              <a:t xml:space="preserve">And then do the larger version of the same move. The org chart is a record of earlier tradeoffs; so is the product category you are working inside. You are allowed to make new ones, and the channel is not spoken for yet. Break the mirror on purpose. Automate the right things. Keep the taste.</a:t>
             </a:r>
             <a:endParaRPr lang="en-US" sz="1200"/>
           </a:p>
@@ -4376,7 +4904,7 @@
                 <a:ea typeface="Arial"/>
                 <a:cs typeface="Arial"/>
               </a:rPr>
-              <a:t xml:space="preserve">02 / 07    SOURCE SLIDE 3</a:t>
+              <a:t xml:space="preserve">02 / 08    SOURCE SLIDE 3</a:t>
             </a:r>
             <a:endParaRPr lang="en-US" sz="1350"/>
           </a:p>
@@ -4801,7 +5329,7 @@
                 <a:ea typeface="Arial"/>
                 <a:cs typeface="Arial"/>
               </a:rPr>
-              <a:t xml:space="preserve">03 / 07    SOURCE SLIDE 5</a:t>
+              <a:t xml:space="preserve">03 / 08    SOURCE SLIDE 5</a:t>
             </a:r>
             <a:endParaRPr lang="en-US" sz="1350"/>
           </a:p>
@@ -5085,7 +5613,7 @@
                 <a:ea typeface="Arial"/>
                 <a:cs typeface="Arial"/>
               </a:rPr>
-              <a:t xml:space="preserve">04 / 07    SOURCE SLIDE 10</a:t>
+              <a:t xml:space="preserve">04 / 08    SOURCE SLIDE 10</a:t>
             </a:r>
             <a:endParaRPr lang="en-US" sz="1350"/>
           </a:p>
@@ -5510,7 +6038,7 @@
                 <a:ea typeface="Arial"/>
                 <a:cs typeface="Arial"/>
               </a:rPr>
-              <a:t xml:space="preserve">05 / 07    SOURCE SLIDE 11</a:t>
+              <a:t xml:space="preserve">05 / 08    SOURCE SLIDE 11</a:t>
             </a:r>
             <a:endParaRPr lang="en-US" sz="1350"/>
           </a:p>
@@ -6033,7 +6561,7 @@
                 <a:ea typeface="Arial"/>
                 <a:cs typeface="Arial"/>
               </a:rPr>
-              <a:t xml:space="preserve">06 / 07    SOURCE SLIDE 12</a:t>
+              <a:t xml:space="preserve">06 / 08    SOURCE SLIDE 12</a:t>
             </a:r>
             <a:endParaRPr lang="en-US" sz="1350"/>
           </a:p>
@@ -6481,7 +7009,7 @@
                 <a:ea typeface="Arial"/>
                 <a:cs typeface="Arial"/>
               </a:rPr>
-              <a:t xml:space="preserve">07 / 07    SOURCE SLIDE 15</a:t>
+              <a:t xml:space="preserve">07 / 08    SOURCE SLIDE 15</a:t>
             </a:r>
             <a:endParaRPr lang="en-US" sz="1350"/>
           </a:p>
@@ -6530,7 +7058,7 @@
                 <a:ea typeface="Arial"/>
                 <a:cs typeface="Arial"/>
               </a:rPr>
-              <a:t xml:space="preserve">Break the mirror on purpose</a:t>
+              <a:t xml:space="preserve">Minority Report, With Terminals</a:t>
             </a:r>
             <a:endParaRPr lang="en-US" sz="3900"/>
           </a:p>
@@ -6628,7 +7156,7 @@
                 <a:ea typeface="Arial"/>
                 <a:cs typeface="Arial"/>
               </a:rPr>
-              <a:t xml:space="preserve">Reprice the handoffs. Draw the interfaces.</a:t>
+              <a:t xml:space="preserve">Generated UI, adapting in real time, per person</a:t>
             </a:r>
             <a:endParaRPr lang="en-US" sz="3150"/>
           </a:p>
@@ -6692,6 +7220,552 @@
         <p:spPr>
           <a:xfrm>
             <a:off x="2000250" y="3558540"/>
+            <a:ext cx="11029950" cy="1059180"/>
+          </a:xfrm>
+          <a:prstGeom prst="rect">
+            <a:avLst/>
+          </a:prstGeom>
+          <a:noFill/>
+          <a:ln>
+            <a:noFill/>
+          </a:ln>
+        </p:spPr>
+        <p:txBody>
+          <a:bodyPr wrap="none" lIns="0" tIns="0" rIns="0" bIns="0" anchor="t">
+            <a:noAutofit/>
+          </a:bodyPr>
+          <a:lstStyle/>
+          <a:p>
+            <a:pPr marL="0" indent="0">
+              <a:lnSpc>
+                <a:spcPts val="4095"/>
+              </a:lnSpc>
+              <a:spcAft>
+                <a:spcPts val="0"/>
+              </a:spcAft>
+              <a:buNone/>
+            </a:pPr>
+            <a:r>
+              <a:rPr lang="en-US" sz="3150" b="0">
+                <a:solidFill>
+                  <a:srgbClr val="F5F1E9"/>
+                </a:solidFill>
+                <a:latin typeface="Arial"/>
+                <a:ea typeface="Arial"/>
+                <a:cs typeface="Arial"/>
+              </a:rPr>
+              <a:t xml:space="preserve">Yes, the software you mastered is going away. As you</a:t>
+            </a:r>
+            <a:endParaRPr lang="en-US" sz="3150"/>
+          </a:p>
+          <a:p>
+            <a:pPr marL="0" indent="0">
+              <a:lnSpc>
+                <a:spcPts val="4095"/>
+              </a:lnSpc>
+              <a:spcAft>
+                <a:spcPts val="0"/>
+              </a:spcAft>
+              <a:buNone/>
+            </a:pPr>
+            <a:r>
+              <a:rPr lang="en-US" sz="3150" b="0">
+                <a:solidFill>
+                  <a:srgbClr val="F5F1E9"/>
+                </a:solidFill>
+                <a:latin typeface="Arial"/>
+                <a:ea typeface="Arial"/>
+                <a:cs typeface="Arial"/>
+              </a:rPr>
+              <a:t xml:space="preserve">know it.</a:t>
+            </a:r>
+            <a:endParaRPr lang="en-US" sz="3150"/>
+          </a:p>
+        </p:txBody>
+      </p:sp>
+      <p:sp>
+        <p:nvSpPr>
+          <p:cNvPr id="8" name="Text 8"/>
+          <p:cNvSpPr txBox="1"/>
+          <p:nvPr/>
+        </p:nvSpPr>
+        <p:spPr>
+          <a:xfrm>
+            <a:off x="685800" y="4865370"/>
+            <a:ext cx="904875" cy="476250"/>
+          </a:xfrm>
+          <a:prstGeom prst="rect">
+            <a:avLst/>
+          </a:prstGeom>
+          <a:noFill/>
+          <a:ln>
+            <a:noFill/>
+          </a:ln>
+        </p:spPr>
+        <p:txBody>
+          <a:bodyPr wrap="none" lIns="0" tIns="0" rIns="0" bIns="0" anchor="t">
+            <a:noAutofit/>
+          </a:bodyPr>
+          <a:lstStyle/>
+          <a:p>
+            <a:pPr marL="0" indent="0">
+              <a:lnSpc>
+                <a:spcPts val="2438"/>
+              </a:lnSpc>
+              <a:spcAft>
+                <a:spcPts val="0"/>
+              </a:spcAft>
+              <a:buNone/>
+            </a:pPr>
+            <a:r>
+              <a:rPr lang="en-US" sz="1875" b="0">
+                <a:solidFill>
+                  <a:srgbClr val="EFB45F"/>
+                </a:solidFill>
+                <a:latin typeface="Arial"/>
+                <a:ea typeface="Arial"/>
+                <a:cs typeface="Arial"/>
+              </a:rPr>
+              <a:t xml:space="preserve">03</a:t>
+            </a:r>
+            <a:endParaRPr lang="en-US" sz="1875"/>
+          </a:p>
+        </p:txBody>
+      </p:sp>
+      <p:sp>
+        <p:nvSpPr>
+          <p:cNvPr id="9" name="Text 9"/>
+          <p:cNvSpPr txBox="1"/>
+          <p:nvPr/>
+        </p:nvSpPr>
+        <p:spPr>
+          <a:xfrm>
+            <a:off x="2000250" y="4865370"/>
+            <a:ext cx="11029950" cy="539115"/>
+          </a:xfrm>
+          <a:prstGeom prst="rect">
+            <a:avLst/>
+          </a:prstGeom>
+          <a:noFill/>
+          <a:ln>
+            <a:noFill/>
+          </a:ln>
+        </p:spPr>
+        <p:txBody>
+          <a:bodyPr wrap="none" lIns="0" tIns="0" rIns="0" bIns="0" anchor="t">
+            <a:noAutofit/>
+          </a:bodyPr>
+          <a:lstStyle/>
+          <a:p>
+            <a:pPr marL="0" indent="0">
+              <a:lnSpc>
+                <a:spcPts val="4095"/>
+              </a:lnSpc>
+              <a:spcAft>
+                <a:spcPts val="0"/>
+              </a:spcAft>
+              <a:buNone/>
+            </a:pPr>
+            <a:r>
+              <a:rPr lang="en-US" sz="3150" b="0">
+                <a:solidFill>
+                  <a:srgbClr val="F5F1E9"/>
+                </a:solidFill>
+                <a:latin typeface="Arial"/>
+                <a:ea typeface="Arial"/>
+                <a:cs typeface="Arial"/>
+              </a:rPr>
+              <a:t xml:space="preserve">The channel is not spoken for.</a:t>
+            </a:r>
+            <a:endParaRPr lang="en-US" sz="3150"/>
+          </a:p>
+        </p:txBody>
+      </p:sp>
+      <p:sp>
+        <p:nvSpPr>
+          <p:cNvPr id="10" name="Text 10"/>
+          <p:cNvSpPr txBox="1"/>
+          <p:nvPr/>
+        </p:nvSpPr>
+        <p:spPr>
+          <a:xfrm>
+            <a:off x="457200" y="8286750"/>
+            <a:ext cx="12477750" cy="190500"/>
+          </a:xfrm>
+          <a:prstGeom prst="rect">
+            <a:avLst/>
+          </a:prstGeom>
+          <a:noFill/>
+          <a:ln>
+            <a:noFill/>
+          </a:ln>
+        </p:spPr>
+        <p:txBody>
+          <a:bodyPr wrap="none" lIns="0" tIns="0" rIns="0" bIns="0" anchor="t">
+            <a:noAutofit/>
+          </a:bodyPr>
+          <a:lstStyle/>
+          <a:p>
+            <a:pPr marL="0" indent="0">
+              <a:lnSpc>
+                <a:spcPts val="1268"/>
+              </a:lnSpc>
+              <a:spcAft>
+                <a:spcPts val="0"/>
+              </a:spcAft>
+              <a:buNone/>
+            </a:pPr>
+            <a:r>
+              <a:rPr lang="en-US" sz="975" b="0">
+                <a:solidFill>
+                  <a:srgbClr val="BEC9C6"/>
+                </a:solidFill>
+                <a:latin typeface="Arial"/>
+                <a:ea typeface="Arial"/>
+                <a:cs typeface="Arial"/>
+              </a:rPr>
+              <a:t xml:space="preserve">The Future of Product Engineering: Break the Mirror on Purpose</a:t>
+            </a:r>
+            <a:endParaRPr lang="en-US" sz="975"/>
+          </a:p>
+        </p:txBody>
+      </p:sp>
+      <p:sp>
+        <p:nvSpPr>
+          <p:cNvPr id="11" name="Text 11"/>
+          <p:cNvSpPr txBox="1"/>
+          <p:nvPr/>
+        </p:nvSpPr>
+        <p:spPr>
+          <a:xfrm>
+            <a:off x="13049250" y="8286750"/>
+            <a:ext cx="238125" cy="190500"/>
+          </a:xfrm>
+          <a:prstGeom prst="rect">
+            <a:avLst/>
+          </a:prstGeom>
+          <a:noFill/>
+          <a:ln>
+            <a:noFill/>
+          </a:ln>
+        </p:spPr>
+        <p:txBody>
+          <a:bodyPr wrap="none" lIns="0" tIns="0" rIns="0" bIns="0" anchor="t">
+            <a:noAutofit/>
+          </a:bodyPr>
+          <a:lstStyle/>
+          <a:p>
+            <a:pPr marL="0" indent="0">
+              <a:lnSpc>
+                <a:spcPts val="1268"/>
+              </a:lnSpc>
+              <a:spcAft>
+                <a:spcPts val="0"/>
+              </a:spcAft>
+              <a:buNone/>
+            </a:pPr>
+            <a:r>
+              <a:rPr lang="en-US" sz="975" b="0">
+                <a:solidFill>
+                  <a:srgbClr val="BEC9C6"/>
+                </a:solidFill>
+                <a:latin typeface="Arial"/>
+                <a:ea typeface="Arial"/>
+                <a:cs typeface="Arial"/>
+              </a:rPr>
+              <a:t xml:space="preserve">7</a:t>
+            </a:r>
+            <a:endParaRPr lang="en-US" sz="975"/>
+          </a:p>
+        </p:txBody>
+      </p:sp>
+    </p:spTree>
+  </p:cSld>
+  <p:clrMapOvr>
+    <a:masterClrMapping/>
+  </p:clrMapOvr>
+</p:sld>
+</file>
+
+<file path=ppt/slides/slide8.xml><?xml version="1.0" encoding="utf-8"?>
+<p:sld xmlns:a="http://schemas.openxmlformats.org/drawingml/2006/main" xmlns:r="http://schemas.openxmlformats.org/officeDocument/2006/relationships" xmlns:p="http://schemas.openxmlformats.org/presentationml/2006/main">
+  <p:cSld name="Slide 8">
+    <p:bg>
+      <p:bgPr>
+        <a:solidFill>
+          <a:srgbClr val="161D26"/>
+        </a:solidFill>
+        <a:effectLst/>
+      </p:bgPr>
+    </p:bg>
+    <p:spTree>
+      <p:nvGrpSpPr>
+        <p:cNvPr id="1" name=""/>
+        <p:cNvGrpSpPr/>
+        <p:nvPr/>
+      </p:nvGrpSpPr>
+      <p:grpSpPr>
+        <a:xfrm>
+          <a:off x="0" y="0"/>
+          <a:ext cx="0" cy="0"/>
+          <a:chOff x="0" y="0"/>
+          <a:chExt cx="0" cy="0"/>
+        </a:xfrm>
+      </p:grpSpPr>
+      <p:sp>
+        <p:nvSpPr>
+          <p:cNvPr id="2" name="Text 2"/>
+          <p:cNvSpPr txBox="1"/>
+          <p:nvPr/>
+        </p:nvSpPr>
+        <p:spPr>
+          <a:xfrm>
+            <a:off x="685800" y="381000"/>
+            <a:ext cx="12344400" cy="457200"/>
+          </a:xfrm>
+          <a:prstGeom prst="rect">
+            <a:avLst/>
+          </a:prstGeom>
+          <a:noFill/>
+          <a:ln>
+            <a:noFill/>
+          </a:ln>
+        </p:spPr>
+        <p:txBody>
+          <a:bodyPr wrap="none" lIns="0" tIns="0" rIns="0" bIns="0" anchor="t">
+            <a:noAutofit/>
+          </a:bodyPr>
+          <a:lstStyle/>
+          <a:p>
+            <a:pPr marL="0" indent="0">
+              <a:lnSpc>
+                <a:spcPts val="1755"/>
+              </a:lnSpc>
+              <a:spcAft>
+                <a:spcPts val="0"/>
+              </a:spcAft>
+              <a:buNone/>
+            </a:pPr>
+            <a:r>
+              <a:rPr lang="en-US" sz="1350" b="1">
+                <a:solidFill>
+                  <a:srgbClr val="EFB45F"/>
+                </a:solidFill>
+                <a:latin typeface="Arial"/>
+                <a:ea typeface="Arial"/>
+                <a:cs typeface="Arial"/>
+              </a:rPr>
+              <a:t xml:space="preserve">08 / 08    SOURCE SLIDE 17</a:t>
+            </a:r>
+            <a:endParaRPr lang="en-US" sz="1350"/>
+          </a:p>
+        </p:txBody>
+      </p:sp>
+      <p:sp>
+        <p:nvSpPr>
+          <p:cNvPr id="3" name="Text 3"/>
+          <p:cNvSpPr txBox="1"/>
+          <p:nvPr/>
+        </p:nvSpPr>
+        <p:spPr>
+          <a:xfrm>
+            <a:off x="685800" y="1057275"/>
+            <a:ext cx="12344400" cy="1381125"/>
+          </a:xfrm>
+          <a:prstGeom prst="rect">
+            <a:avLst/>
+          </a:prstGeom>
+          <a:noFill/>
+          <a:ln>
+            <a:noFill/>
+          </a:ln>
+        </p:spPr>
+        <p:txBody>
+          <a:bodyPr wrap="none" lIns="0" tIns="0" rIns="0" bIns="0" anchor="t">
+            <a:noAutofit/>
+          </a:bodyPr>
+          <a:lstStyle/>
+          <a:p>
+            <a:pPr marL="0" indent="0">
+              <a:lnSpc>
+                <a:spcPts val="4680"/>
+              </a:lnSpc>
+              <a:spcAft>
+                <a:spcPts val="0"/>
+              </a:spcAft>
+              <a:buNone/>
+            </a:pPr>
+            <a:r>
+              <a:rPr lang="en-US" sz="3900" b="1">
+                <a:solidFill>
+                  <a:srgbClr val="F5F1E9"/>
+                </a:solidFill>
+                <a:latin typeface="Arial"/>
+                <a:ea typeface="Arial"/>
+                <a:cs typeface="Arial"/>
+              </a:rPr>
+              <a:t xml:space="preserve">Break the mirror on purpose</a:t>
+            </a:r>
+            <a:endParaRPr lang="en-US" sz="3900"/>
+          </a:p>
+        </p:txBody>
+      </p:sp>
+      <p:sp>
+        <p:nvSpPr>
+          <p:cNvPr id="4" name="Text 4"/>
+          <p:cNvSpPr txBox="1"/>
+          <p:nvPr/>
+        </p:nvSpPr>
+        <p:spPr>
+          <a:xfrm>
+            <a:off x="685800" y="2771775"/>
+            <a:ext cx="904875" cy="476250"/>
+          </a:xfrm>
+          <a:prstGeom prst="rect">
+            <a:avLst/>
+          </a:prstGeom>
+          <a:noFill/>
+          <a:ln>
+            <a:noFill/>
+          </a:ln>
+        </p:spPr>
+        <p:txBody>
+          <a:bodyPr wrap="none" lIns="0" tIns="0" rIns="0" bIns="0" anchor="t">
+            <a:noAutofit/>
+          </a:bodyPr>
+          <a:lstStyle/>
+          <a:p>
+            <a:pPr marL="0" indent="0">
+              <a:lnSpc>
+                <a:spcPts val="2438"/>
+              </a:lnSpc>
+              <a:spcAft>
+                <a:spcPts val="0"/>
+              </a:spcAft>
+              <a:buNone/>
+            </a:pPr>
+            <a:r>
+              <a:rPr lang="en-US" sz="1875" b="0">
+                <a:solidFill>
+                  <a:srgbClr val="EFB45F"/>
+                </a:solidFill>
+                <a:latin typeface="Arial"/>
+                <a:ea typeface="Arial"/>
+                <a:cs typeface="Arial"/>
+              </a:rPr>
+              <a:t xml:space="preserve">01</a:t>
+            </a:r>
+            <a:endParaRPr lang="en-US" sz="1875"/>
+          </a:p>
+        </p:txBody>
+      </p:sp>
+      <p:sp>
+        <p:nvSpPr>
+          <p:cNvPr id="5" name="Text 5"/>
+          <p:cNvSpPr txBox="1"/>
+          <p:nvPr/>
+        </p:nvSpPr>
+        <p:spPr>
+          <a:xfrm>
+            <a:off x="2000250" y="2771775"/>
+            <a:ext cx="11029950" cy="539115"/>
+          </a:xfrm>
+          <a:prstGeom prst="rect">
+            <a:avLst/>
+          </a:prstGeom>
+          <a:noFill/>
+          <a:ln>
+            <a:noFill/>
+          </a:ln>
+        </p:spPr>
+        <p:txBody>
+          <a:bodyPr wrap="none" lIns="0" tIns="0" rIns="0" bIns="0" anchor="t">
+            <a:noAutofit/>
+          </a:bodyPr>
+          <a:lstStyle/>
+          <a:p>
+            <a:pPr marL="0" indent="0">
+              <a:lnSpc>
+                <a:spcPts val="4095"/>
+              </a:lnSpc>
+              <a:spcAft>
+                <a:spcPts val="0"/>
+              </a:spcAft>
+              <a:buNone/>
+            </a:pPr>
+            <a:r>
+              <a:rPr lang="en-US" sz="3150" b="0">
+                <a:solidFill>
+                  <a:srgbClr val="F5F1E9"/>
+                </a:solidFill>
+                <a:latin typeface="Arial"/>
+                <a:ea typeface="Arial"/>
+                <a:cs typeface="Arial"/>
+              </a:rPr>
+              <a:t xml:space="preserve">Reprice the handoffs. Draw the interfaces.</a:t>
+            </a:r>
+            <a:endParaRPr lang="en-US" sz="3150"/>
+          </a:p>
+        </p:txBody>
+      </p:sp>
+      <p:sp>
+        <p:nvSpPr>
+          <p:cNvPr id="6" name="Text 6"/>
+          <p:cNvSpPr txBox="1"/>
+          <p:nvPr/>
+        </p:nvSpPr>
+        <p:spPr>
+          <a:xfrm>
+            <a:off x="685800" y="3558540"/>
+            <a:ext cx="904875" cy="476250"/>
+          </a:xfrm>
+          <a:prstGeom prst="rect">
+            <a:avLst/>
+          </a:prstGeom>
+          <a:noFill/>
+          <a:ln>
+            <a:noFill/>
+          </a:ln>
+        </p:spPr>
+        <p:txBody>
+          <a:bodyPr wrap="none" lIns="0" tIns="0" rIns="0" bIns="0" anchor="t">
+            <a:noAutofit/>
+          </a:bodyPr>
+          <a:lstStyle/>
+          <a:p>
+            <a:pPr marL="0" indent="0">
+              <a:lnSpc>
+                <a:spcPts val="2438"/>
+              </a:lnSpc>
+              <a:spcAft>
+                <a:spcPts val="0"/>
+              </a:spcAft>
+              <a:buNone/>
+            </a:pPr>
+            <a:r>
+              <a:rPr lang="en-US" sz="1875" b="0">
+                <a:solidFill>
+                  <a:srgbClr val="EFB45F"/>
+                </a:solidFill>
+                <a:latin typeface="Arial"/>
+                <a:ea typeface="Arial"/>
+                <a:cs typeface="Arial"/>
+              </a:rPr>
+              <a:t xml:space="preserve">02</a:t>
+            </a:r>
+            <a:endParaRPr lang="en-US" sz="1875"/>
+          </a:p>
+        </p:txBody>
+      </p:sp>
+      <p:sp>
+        <p:nvSpPr>
+          <p:cNvPr id="7" name="Text 7"/>
+          <p:cNvSpPr txBox="1"/>
+          <p:nvPr/>
+        </p:nvSpPr>
+        <p:spPr>
+          <a:xfrm>
+            <a:off x="2000250" y="3558540"/>
             <a:ext cx="11029950" cy="539115"/>
           </a:xfrm>
           <a:prstGeom prst="rect">
@@ -6824,7 +7898,7 @@
                 <a:ea typeface="Arial"/>
                 <a:cs typeface="Arial"/>
               </a:rPr>
-              <a:t xml:space="preserve">7</a:t>
+              <a:t xml:space="preserve">8</a:t>
             </a:r>
             <a:endParaRPr lang="en-US" sz="975"/>
           </a:p>

--- a/artifacts/speaking-portfolio-expanded/decks/product-engineering-15min-screen.pptx
+++ b/artifacts/speaking-portfolio-expanded/decks/product-engineering-15min-screen.pptx
@@ -146,7 +146,7 @@
                 <a:ea typeface="Arial"/>
                 <a:cs typeface="Arial"/>
               </a:rPr>
-              <a:t xml:space="preserve">Source slide 1. 00:00 to 01:30</a:t>
+              <a:t xml:space="preserve">Source slide 1. 00:00 to 01:45</a:t>
             </a:r>
             <a:endParaRPr lang="en-US" sz="1200"/>
           </a:p>
@@ -673,7 +673,7 @@
                 <a:ea typeface="Arial"/>
                 <a:cs typeface="Arial"/>
               </a:rPr>
-              <a:t xml:space="preserve">Source slide 3. 01:30 to 03:00</a:t>
+              <a:t xml:space="preserve">Source slide 3. 01:45 to 03:00</a:t>
             </a:r>
             <a:endParaRPr lang="en-US" sz="1200"/>
           </a:p>
@@ -812,52 +812,6 @@
                 <a:cs typeface="Arial"/>
               </a:rPr>
               <a:t xml:space="preserve">Coase asked why firms exist when people could contract through the market. Using the market costs something; coordinating inside the firm costs something too. The boundary depends on that comparison.</a:t>
-            </a:r>
-            <a:endParaRPr lang="en-US" sz="1200"/>
-          </a:p>
-          <a:p>
-            <a:pPr marL="0" indent="0">
-              <a:lnSpc>
-                <a:spcPts val="1560"/>
-              </a:lnSpc>
-              <a:spcAft>
-                <a:spcPts val="0"/>
-              </a:spcAft>
-              <a:buNone/>
-            </a:pPr>
-            <a:r>
-              <a:rPr lang="en-US" sz="1200" b="0">
-                <a:solidFill>
-                  <a:srgbClr val="202b33"/>
-                </a:solidFill>
-                <a:latin typeface="Arial"/>
-                <a:ea typeface="Arial"/>
-                <a:cs typeface="Arial"/>
-              </a:rPr>
-              <a:t xml:space="preserve"/>
-            </a:r>
-            <a:endParaRPr lang="en-US" sz="1200"/>
-          </a:p>
-          <a:p>
-            <a:pPr marL="0" indent="0">
-              <a:lnSpc>
-                <a:spcPts val="1560"/>
-              </a:lnSpc>
-              <a:spcAft>
-                <a:spcPts val="0"/>
-              </a:spcAft>
-              <a:buNone/>
-            </a:pPr>
-            <a:r>
-              <a:rPr lang="en-US" sz="1200" b="0">
-                <a:solidFill>
-                  <a:srgbClr val="202b33"/>
-                </a:solidFill>
-                <a:latin typeface="Arial"/>
-                <a:ea typeface="Arial"/>
-                <a:cs typeface="Arial"/>
-              </a:rPr>
-              <a:t xml:space="preserve">Apply that question inside a product group. A weekly brief may have existed because collecting it took somebody two days. A separate triage meeting may have existed because linking a complaint to a trace required three people and a spreadsheet. If those costs change, the old boundary deserves another look.</a:t>
             </a:r>
             <a:endParaRPr lang="en-US" sz="1200"/>
           </a:p>
@@ -1200,7 +1154,7 @@
                 <a:ea typeface="Arial"/>
                 <a:cs typeface="Arial"/>
               </a:rPr>
-              <a:t xml:space="preserve">Source slide 5. 03:00 to 05:00</a:t>
+              <a:t xml:space="preserve">Source slide 5. 03:00 to 04:30</a:t>
             </a:r>
             <a:endParaRPr lang="en-US" sz="1200"/>
           </a:p>
@@ -1431,52 +1385,6 @@
                 <a:cs typeface="Arial"/>
               </a:rPr>
               <a:t xml:space="preserve">Research delivers a brief with source URLs and dates. Feedback delivers clusters with the original complaints attached. The product review resolves disagreement between them and writes the accepted hypothesis. A build agent consumes that artifact. It does not poll six chat histories and guess which decision won.</a:t>
-            </a:r>
-            <a:endParaRPr lang="en-US" sz="1200"/>
-          </a:p>
-          <a:p>
-            <a:pPr marL="0" indent="0">
-              <a:lnSpc>
-                <a:spcPts val="1560"/>
-              </a:lnSpc>
-              <a:spcAft>
-                <a:spcPts val="0"/>
-              </a:spcAft>
-              <a:buNone/>
-            </a:pPr>
-            <a:r>
-              <a:rPr lang="en-US" sz="1200" b="0">
-                <a:solidFill>
-                  <a:srgbClr val="202b33"/>
-                </a:solidFill>
-                <a:latin typeface="Arial"/>
-                <a:ea typeface="Arial"/>
-                <a:cs typeface="Arial"/>
-              </a:rPr>
-              <a:t xml:space="preserve"/>
-            </a:r>
-            <a:endParaRPr lang="en-US" sz="1200"/>
-          </a:p>
-          <a:p>
-            <a:pPr marL="0" indent="0">
-              <a:lnSpc>
-                <a:spcPts val="1560"/>
-              </a:lnSpc>
-              <a:spcAft>
-                <a:spcPts val="0"/>
-              </a:spcAft>
-              <a:buNone/>
-            </a:pPr>
-            <a:r>
-              <a:rPr lang="en-US" sz="1200" b="0">
-                <a:solidFill>
-                  <a:srgbClr val="202b33"/>
-                </a:solidFill>
-                <a:latin typeface="Arial"/>
-                <a:ea typeface="Arial"/>
-                <a:cs typeface="Arial"/>
-              </a:rPr>
-              <a:t xml:space="preserve">Team Topologies distinguishes collaboration, service consumption, and facilitation. Use collaboration while discovering the interface. Make the repeated delivery a service once the contract is understood. Keep facilitation temporary. An agent roster without these wires is a seating plan.</a:t>
             </a:r>
             <a:endParaRPr lang="en-US" sz="1200"/>
           </a:p>
@@ -1773,7 +1681,7 @@
                 <a:ea typeface="Arial"/>
                 <a:cs typeface="Arial"/>
               </a:rPr>
-              <a:t xml:space="preserve">Source slide 10. 05:00 to 06:30</a:t>
+              <a:t xml:space="preserve">Source slide 10. 04:30 to 05:45</a:t>
             </a:r>
             <a:endParaRPr lang="en-US" sz="1200"/>
           </a:p>
@@ -1958,52 +1866,6 @@
                 <a:cs typeface="Arial"/>
               </a:rPr>
               <a:t xml:space="preserve">Our target is onboarding activation. The next screen has three candidates. Before we inspect anything else, choose the one you would investigate. Do not reverse-engineer the answer from the names; they are A, B, and C.</a:t>
-            </a:r>
-            <a:endParaRPr lang="en-US" sz="1200"/>
-          </a:p>
-          <a:p>
-            <a:pPr marL="0" indent="0">
-              <a:lnSpc>
-                <a:spcPts val="1560"/>
-              </a:lnSpc>
-              <a:spcAft>
-                <a:spcPts val="0"/>
-              </a:spcAft>
-              <a:buNone/>
-            </a:pPr>
-            <a:r>
-              <a:rPr lang="en-US" sz="1200" b="0">
-                <a:solidFill>
-                  <a:srgbClr val="202b33"/>
-                </a:solidFill>
-                <a:latin typeface="Arial"/>
-                <a:ea typeface="Arial"/>
-                <a:cs typeface="Arial"/>
-              </a:rPr>
-              <a:t xml:space="preserve"/>
-            </a:r>
-            <a:endParaRPr lang="en-US" sz="1200"/>
-          </a:p>
-          <a:p>
-            <a:pPr marL="0" indent="0">
-              <a:lnSpc>
-                <a:spcPts val="1560"/>
-              </a:lnSpc>
-              <a:spcAft>
-                <a:spcPts val="0"/>
-              </a:spcAft>
-              <a:buNone/>
-            </a:pPr>
-            <a:r>
-              <a:rPr lang="en-US" sz="1200" b="0">
-                <a:solidFill>
-                  <a:srgbClr val="202b33"/>
-                </a:solidFill>
-                <a:latin typeface="Arial"/>
-                <a:ea typeface="Arial"/>
-                <a:cs typeface="Arial"/>
-              </a:rPr>
-              <a:t xml:space="preserve">The interesting question is what the winning candidate did to earn the number. A metric tells you that something moved. It does not tell you whether you wanted the movement.</a:t>
             </a:r>
             <a:endParaRPr lang="en-US" sz="1200"/>
           </a:p>
@@ -2300,7 +2162,7 @@
                 <a:ea typeface="Arial"/>
                 <a:cs typeface="Arial"/>
               </a:rPr>
-              <a:t xml:space="preserve">Source slide 11. 06:30 to 10:00</a:t>
+              <a:t xml:space="preserve">Source slide 11. 05:45 to 08:45</a:t>
             </a:r>
             <a:endParaRPr lang="en-US" sz="1200"/>
           </a:p>
@@ -2873,7 +2735,7 @@
                 <a:ea typeface="Arial"/>
                 <a:cs typeface="Arial"/>
               </a:rPr>
-              <a:t xml:space="preserve">Source slide 12. 10:00 to 11:30</a:t>
+              <a:t xml:space="preserve">Source slide 12. 08:45 to 10:45</a:t>
             </a:r>
             <a:endParaRPr lang="en-US" sz="1200"/>
           </a:p>
@@ -3241,7 +3103,7 @@
                 <a:ea typeface="Arial"/>
                 <a:cs typeface="Arial"/>
               </a:rPr>
-              <a:t xml:space="preserve">Bridge: ownership consumes attention, and it is about to consume fuel; limit interfaces, reserve recovery practice, and put the ongoing token burn beside the latency budget.</a:t>
+              <a:t xml:space="preserve">Bridge: ownership consumes attention, and it is about to consume fuel. Two predictions close this talk and I will label them as predictions once, because I have measured neither. The first: tokens stop being a build cost and become a running cost, defensive agents run forever, and the ongoing burn belongs in the design doc beside the latency budget, with an owner who is not whoever wrote the prompt.</a:t>
             </a:r>
             <a:endParaRPr lang="en-US" sz="1200"/>
           </a:p>
@@ -3354,7 +3216,7 @@
                 <a:ea typeface="Arial"/>
                 <a:cs typeface="Arial"/>
               </a:rPr>
-              <a:t xml:space="preserve">Source slide 15. 11:30 to 13:30</a:t>
+              <a:t xml:space="preserve">Source slide 15. 10:45 to 13:30</a:t>
             </a:r>
             <a:endParaRPr lang="en-US" sz="1200"/>
           </a:p>
@@ -3538,7 +3400,7 @@
                 <a:ea typeface="Arial"/>
                 <a:cs typeface="Arial"/>
               </a:rPr>
-              <a:t xml:space="preserve">Which raises the question this room should actually be arguing about. Should OpenAI and Anthropic end up owning every software channel? Watch what happens when the assistants ship real-time collaboration: who spends less time in email, Slack and Google Docs then? I can already make and edit images and video in ways that make me less likely to open Photoshop or DaVinci. If I need a jingle for the company, I ask Suno and it is done. So is everything you spent a lifetime learning, mastering and fighting with about to be irrelevant? Yes. At least as you know it.</a:t>
+              <a:t xml:space="preserve">Second prediction, and this one is less comfortable. AI does not magically make software work. Well-understood software still gets harder to operate as the world moves under it: you outgrow a performance envelope, you accumulate features, somebody deprecates your dependency. Generation makes the first version cheap. It does not make the tenth year cheap.</a:t>
             </a:r>
             <a:endParaRPr lang="en-US" sz="1200"/>
           </a:p>
@@ -4019,99 +3881,7 @@
                 <a:ea typeface="Arial"/>
                 <a:cs typeface="Arial"/>
               </a:rPr>
-              <a:t xml:space="preserve">Back to the org chart. Some of those boundaries exist because the work really is different. Some exist because the person with the spreadsheet sat in another department. We should know which before teaching agents to repeat them.</a:t>
-            </a:r>
-            <a:endParaRPr lang="en-US" sz="1200"/>
-          </a:p>
-          <a:p>
-            <a:pPr marL="0" indent="0">
-              <a:lnSpc>
-                <a:spcPts val="1560"/>
-              </a:lnSpc>
-              <a:spcAft>
-                <a:spcPts val="0"/>
-              </a:spcAft>
-              <a:buNone/>
-            </a:pPr>
-            <a:r>
-              <a:rPr lang="en-US" sz="1200" b="0">
-                <a:solidFill>
-                  <a:srgbClr val="202b33"/>
-                </a:solidFill>
-                <a:latin typeface="Arial"/>
-                <a:ea typeface="Arial"/>
-                <a:cs typeface="Arial"/>
-              </a:rPr>
-              <a:t xml:space="preserve"/>
-            </a:r>
-            <a:endParaRPr lang="en-US" sz="1200"/>
-          </a:p>
-          <a:p>
-            <a:pPr marL="0" indent="0">
-              <a:lnSpc>
-                <a:spcPts val="1560"/>
-              </a:lnSpc>
-              <a:spcAft>
-                <a:spcPts val="0"/>
-              </a:spcAft>
-              <a:buNone/>
-            </a:pPr>
-            <a:r>
-              <a:rPr lang="en-US" sz="1200" b="0">
-                <a:solidFill>
-                  <a:srgbClr val="202b33"/>
-                </a:solidFill>
-                <a:latin typeface="Arial"/>
-                <a:ea typeface="Arial"/>
-                <a:cs typeface="Arial"/>
-              </a:rPr>
               <a:t xml:space="preserve">Take one boundary. What arrives, what leaves, who decides, and what did it cost last week? Make collection cheaper without erasing the disagreement the handoff used to expose. Keep the product review where the evidence conflicts, and give the decision a durable artifact so the next agent does not have to guess.</a:t>
-            </a:r>
-            <a:endParaRPr lang="en-US" sz="1200"/>
-          </a:p>
-          <a:p>
-            <a:pPr marL="0" indent="0">
-              <a:lnSpc>
-                <a:spcPts val="1560"/>
-              </a:lnSpc>
-              <a:spcAft>
-                <a:spcPts val="0"/>
-              </a:spcAft>
-              <a:buNone/>
-            </a:pPr>
-            <a:r>
-              <a:rPr lang="en-US" sz="1200" b="0">
-                <a:solidFill>
-                  <a:srgbClr val="202b33"/>
-                </a:solidFill>
-                <a:latin typeface="Arial"/>
-                <a:ea typeface="Arial"/>
-                <a:cs typeface="Arial"/>
-              </a:rPr>
-              <a:t xml:space="preserve"/>
-            </a:r>
-            <a:endParaRPr lang="en-US" sz="1200"/>
-          </a:p>
-          <a:p>
-            <a:pPr marL="0" indent="0">
-              <a:lnSpc>
-                <a:spcPts val="1560"/>
-              </a:lnSpc>
-              <a:spcAft>
-                <a:spcPts val="0"/>
-              </a:spcAft>
-              <a:buNone/>
-            </a:pPr>
-            <a:r>
-              <a:rPr lang="en-US" sz="1200" b="0">
-                <a:solidFill>
-                  <a:srgbClr val="202b33"/>
-                </a:solidFill>
-                <a:latin typeface="Arial"/>
-                <a:ea typeface="Arial"/>
-                <a:cs typeface="Arial"/>
-              </a:rPr>
-              <a:t xml:space="preserve">Then price ownership, and price the fuel. Six agents do not become free because one person has their names in a config file, and neither does the burn that keeps them running. Put permission before customer consequences.</a:t>
             </a:r>
             <a:endParaRPr lang="en-US" sz="1200"/>
           </a:p>
@@ -7066,324 +6836,62 @@
       </p:sp>
       <p:sp>
         <p:nvSpPr>
-          <p:cNvPr id="4" name="Text 4"/>
-          <p:cNvSpPr txBox="1"/>
+          <p:cNvPr id="4" name="Image background"/>
+          <p:cNvSpPr/>
           <p:nvPr/>
         </p:nvSpPr>
         <p:spPr>
           <a:xfrm>
-            <a:off x="685800" y="2771775"/>
-            <a:ext cx="904875" cy="476250"/>
+            <a:off x="944880" y="2647950"/>
+            <a:ext cx="11826240" cy="4619625"/>
           </a:xfrm>
           <a:prstGeom prst="rect">
             <a:avLst/>
           </a:prstGeom>
-          <a:noFill/>
+          <a:solidFill>
+            <a:srgbClr val="161D26"/>
+          </a:solidFill>
           <a:ln>
             <a:noFill/>
           </a:ln>
         </p:spPr>
-        <p:txBody>
-          <a:bodyPr wrap="none" lIns="0" tIns="0" rIns="0" bIns="0" anchor="t">
-            <a:noAutofit/>
-          </a:bodyPr>
-          <a:lstStyle/>
-          <a:p>
-            <a:pPr marL="0" indent="0">
-              <a:lnSpc>
-                <a:spcPts val="2438"/>
-              </a:lnSpc>
-              <a:spcAft>
-                <a:spcPts val="0"/>
-              </a:spcAft>
-              <a:buNone/>
-            </a:pPr>
-            <a:r>
-              <a:rPr lang="en-US" sz="1875" b="0">
-                <a:solidFill>
-                  <a:srgbClr val="EFB45F"/>
-                </a:solidFill>
-                <a:latin typeface="Arial"/>
-                <a:ea typeface="Arial"/>
-                <a:cs typeface="Arial"/>
-              </a:rPr>
-              <a:t xml:space="preserve">01</a:t>
-            </a:r>
-            <a:endParaRPr lang="en-US" sz="1875"/>
-          </a:p>
-        </p:txBody>
       </p:sp>
-      <p:sp>
-        <p:nvSpPr>
-          <p:cNvPr id="5" name="Text 5"/>
-          <p:cNvSpPr txBox="1"/>
+      <p:pic>
+        <p:nvPicPr>
+          <p:cNvPr id="5" name="f1622316a6930645ce2701de05e30b019086ac9401bd06917acb71f400ca25e3" descr="Prediction: a grid of chosen apps gives way to one generated surface, adapting per person, with a revived terminal beside it. Who owns that channel is still open, and non-frontier builders can rethink any app as AI-native."/>
+          <p:cNvPicPr>
+            <a:picLocks noChangeAspect="1"/>
+          </p:cNvPicPr>
           <p:nvPr/>
-        </p:nvSpPr>
+        </p:nvPicPr>
+        <p:blipFill>
+          <a:blip r:embed="rIdImage1">
+            <a:extLst>
+              <a:ext uri="{96DAC541-7B7A-43D3-8B79-37D633B846F1}">
+                <asvg:svgBlip xmlns:asvg="http://schemas.microsoft.com/office/drawing/2016/SVG/main" r:embed="rIdSvg1"/>
+              </a:ext>
+            </a:extLst>
+          </a:blip>
+          <a:stretch>
+            <a:fillRect/>
+          </a:stretch>
+        </p:blipFill>
         <p:spPr>
           <a:xfrm>
-            <a:off x="2000250" y="2771775"/>
-            <a:ext cx="11029950" cy="539115"/>
+            <a:off x="944880" y="2647950"/>
+            <a:ext cx="11826240" cy="4619625"/>
           </a:xfrm>
           <a:prstGeom prst="rect">
             <a:avLst/>
           </a:prstGeom>
-          <a:noFill/>
           <a:ln>
             <a:noFill/>
           </a:ln>
         </p:spPr>
-        <p:txBody>
-          <a:bodyPr wrap="none" lIns="0" tIns="0" rIns="0" bIns="0" anchor="t">
-            <a:noAutofit/>
-          </a:bodyPr>
-          <a:lstStyle/>
-          <a:p>
-            <a:pPr marL="0" indent="0">
-              <a:lnSpc>
-                <a:spcPts val="4095"/>
-              </a:lnSpc>
-              <a:spcAft>
-                <a:spcPts val="0"/>
-              </a:spcAft>
-              <a:buNone/>
-            </a:pPr>
-            <a:r>
-              <a:rPr lang="en-US" sz="3150" b="0">
-                <a:solidFill>
-                  <a:srgbClr val="F5F1E9"/>
-                </a:solidFill>
-                <a:latin typeface="Arial"/>
-                <a:ea typeface="Arial"/>
-                <a:cs typeface="Arial"/>
-              </a:rPr>
-              <a:t xml:space="preserve">Generated UI, adapting in real time, per person</a:t>
-            </a:r>
-            <a:endParaRPr lang="en-US" sz="3150"/>
-          </a:p>
-        </p:txBody>
-      </p:sp>
+      </p:pic>
       <p:sp>
         <p:nvSpPr>
           <p:cNvPr id="6" name="Text 6"/>
-          <p:cNvSpPr txBox="1"/>
-          <p:nvPr/>
-        </p:nvSpPr>
-        <p:spPr>
-          <a:xfrm>
-            <a:off x="685800" y="3558540"/>
-            <a:ext cx="904875" cy="476250"/>
-          </a:xfrm>
-          <a:prstGeom prst="rect">
-            <a:avLst/>
-          </a:prstGeom>
-          <a:noFill/>
-          <a:ln>
-            <a:noFill/>
-          </a:ln>
-        </p:spPr>
-        <p:txBody>
-          <a:bodyPr wrap="none" lIns="0" tIns="0" rIns="0" bIns="0" anchor="t">
-            <a:noAutofit/>
-          </a:bodyPr>
-          <a:lstStyle/>
-          <a:p>
-            <a:pPr marL="0" indent="0">
-              <a:lnSpc>
-                <a:spcPts val="2438"/>
-              </a:lnSpc>
-              <a:spcAft>
-                <a:spcPts val="0"/>
-              </a:spcAft>
-              <a:buNone/>
-            </a:pPr>
-            <a:r>
-              <a:rPr lang="en-US" sz="1875" b="0">
-                <a:solidFill>
-                  <a:srgbClr val="EFB45F"/>
-                </a:solidFill>
-                <a:latin typeface="Arial"/>
-                <a:ea typeface="Arial"/>
-                <a:cs typeface="Arial"/>
-              </a:rPr>
-              <a:t xml:space="preserve">02</a:t>
-            </a:r>
-            <a:endParaRPr lang="en-US" sz="1875"/>
-          </a:p>
-        </p:txBody>
-      </p:sp>
-      <p:sp>
-        <p:nvSpPr>
-          <p:cNvPr id="7" name="Text 7"/>
-          <p:cNvSpPr txBox="1"/>
-          <p:nvPr/>
-        </p:nvSpPr>
-        <p:spPr>
-          <a:xfrm>
-            <a:off x="2000250" y="3558540"/>
-            <a:ext cx="11029950" cy="1059180"/>
-          </a:xfrm>
-          <a:prstGeom prst="rect">
-            <a:avLst/>
-          </a:prstGeom>
-          <a:noFill/>
-          <a:ln>
-            <a:noFill/>
-          </a:ln>
-        </p:spPr>
-        <p:txBody>
-          <a:bodyPr wrap="none" lIns="0" tIns="0" rIns="0" bIns="0" anchor="t">
-            <a:noAutofit/>
-          </a:bodyPr>
-          <a:lstStyle/>
-          <a:p>
-            <a:pPr marL="0" indent="0">
-              <a:lnSpc>
-                <a:spcPts val="4095"/>
-              </a:lnSpc>
-              <a:spcAft>
-                <a:spcPts val="0"/>
-              </a:spcAft>
-              <a:buNone/>
-            </a:pPr>
-            <a:r>
-              <a:rPr lang="en-US" sz="3150" b="0">
-                <a:solidFill>
-                  <a:srgbClr val="F5F1E9"/>
-                </a:solidFill>
-                <a:latin typeface="Arial"/>
-                <a:ea typeface="Arial"/>
-                <a:cs typeface="Arial"/>
-              </a:rPr>
-              <a:t xml:space="preserve">Yes, the software you mastered is going away. As you</a:t>
-            </a:r>
-            <a:endParaRPr lang="en-US" sz="3150"/>
-          </a:p>
-          <a:p>
-            <a:pPr marL="0" indent="0">
-              <a:lnSpc>
-                <a:spcPts val="4095"/>
-              </a:lnSpc>
-              <a:spcAft>
-                <a:spcPts val="0"/>
-              </a:spcAft>
-              <a:buNone/>
-            </a:pPr>
-            <a:r>
-              <a:rPr lang="en-US" sz="3150" b="0">
-                <a:solidFill>
-                  <a:srgbClr val="F5F1E9"/>
-                </a:solidFill>
-                <a:latin typeface="Arial"/>
-                <a:ea typeface="Arial"/>
-                <a:cs typeface="Arial"/>
-              </a:rPr>
-              <a:t xml:space="preserve">know it.</a:t>
-            </a:r>
-            <a:endParaRPr lang="en-US" sz="3150"/>
-          </a:p>
-        </p:txBody>
-      </p:sp>
-      <p:sp>
-        <p:nvSpPr>
-          <p:cNvPr id="8" name="Text 8"/>
-          <p:cNvSpPr txBox="1"/>
-          <p:nvPr/>
-        </p:nvSpPr>
-        <p:spPr>
-          <a:xfrm>
-            <a:off x="685800" y="4865370"/>
-            <a:ext cx="904875" cy="476250"/>
-          </a:xfrm>
-          <a:prstGeom prst="rect">
-            <a:avLst/>
-          </a:prstGeom>
-          <a:noFill/>
-          <a:ln>
-            <a:noFill/>
-          </a:ln>
-        </p:spPr>
-        <p:txBody>
-          <a:bodyPr wrap="none" lIns="0" tIns="0" rIns="0" bIns="0" anchor="t">
-            <a:noAutofit/>
-          </a:bodyPr>
-          <a:lstStyle/>
-          <a:p>
-            <a:pPr marL="0" indent="0">
-              <a:lnSpc>
-                <a:spcPts val="2438"/>
-              </a:lnSpc>
-              <a:spcAft>
-                <a:spcPts val="0"/>
-              </a:spcAft>
-              <a:buNone/>
-            </a:pPr>
-            <a:r>
-              <a:rPr lang="en-US" sz="1875" b="0">
-                <a:solidFill>
-                  <a:srgbClr val="EFB45F"/>
-                </a:solidFill>
-                <a:latin typeface="Arial"/>
-                <a:ea typeface="Arial"/>
-                <a:cs typeface="Arial"/>
-              </a:rPr>
-              <a:t xml:space="preserve">03</a:t>
-            </a:r>
-            <a:endParaRPr lang="en-US" sz="1875"/>
-          </a:p>
-        </p:txBody>
-      </p:sp>
-      <p:sp>
-        <p:nvSpPr>
-          <p:cNvPr id="9" name="Text 9"/>
-          <p:cNvSpPr txBox="1"/>
-          <p:nvPr/>
-        </p:nvSpPr>
-        <p:spPr>
-          <a:xfrm>
-            <a:off x="2000250" y="4865370"/>
-            <a:ext cx="11029950" cy="539115"/>
-          </a:xfrm>
-          <a:prstGeom prst="rect">
-            <a:avLst/>
-          </a:prstGeom>
-          <a:noFill/>
-          <a:ln>
-            <a:noFill/>
-          </a:ln>
-        </p:spPr>
-        <p:txBody>
-          <a:bodyPr wrap="none" lIns="0" tIns="0" rIns="0" bIns="0" anchor="t">
-            <a:noAutofit/>
-          </a:bodyPr>
-          <a:lstStyle/>
-          <a:p>
-            <a:pPr marL="0" indent="0">
-              <a:lnSpc>
-                <a:spcPts val="4095"/>
-              </a:lnSpc>
-              <a:spcAft>
-                <a:spcPts val="0"/>
-              </a:spcAft>
-              <a:buNone/>
-            </a:pPr>
-            <a:r>
-              <a:rPr lang="en-US" sz="3150" b="0">
-                <a:solidFill>
-                  <a:srgbClr val="F5F1E9"/>
-                </a:solidFill>
-                <a:latin typeface="Arial"/>
-                <a:ea typeface="Arial"/>
-                <a:cs typeface="Arial"/>
-              </a:rPr>
-              <a:t xml:space="preserve">The channel is not spoken for.</a:t>
-            </a:r>
-            <a:endParaRPr lang="en-US" sz="3150"/>
-          </a:p>
-        </p:txBody>
-      </p:sp>
-      <p:sp>
-        <p:nvSpPr>
-          <p:cNvPr id="10" name="Text 10"/>
           <p:cNvSpPr txBox="1"/>
           <p:nvPr/>
         </p:nvSpPr>
@@ -7432,7 +6940,7 @@
       </p:sp>
       <p:sp>
         <p:nvSpPr>
-          <p:cNvPr id="11" name="Text 11"/>
+          <p:cNvPr id="7" name="Text 7"/>
           <p:cNvSpPr txBox="1"/>
           <p:nvPr/>
         </p:nvSpPr>

--- a/artifacts/speaking-portfolio-expanded/decks/product-engineering-15min-screen.pptx
+++ b/artifacts/speaking-portfolio-expanded/decks/product-engineering-15min-screen.pptx
@@ -3492,7 +3492,7 @@
                 <a:ea typeface="Arial"/>
                 <a:cs typeface="Arial"/>
               </a:rPr>
-              <a:t xml:space="preserve">Here is the part I want you to leave with. That future is not spoken for. GPT image being pretty good does not mean the story of image creation belongs to the big players, and the same is true in whichever industry you work in. Those of us who do not work at a frontier lab, the organic agents in the room, get to rethink any and every app as an AI-native system from the boundary up. That is this whole talk one level higher: do not photocopy today's product categories onto tomorrow's substrate either.</a:t>
+              <a:t xml:space="preserve">Here is the part I want you to leave with. That future is not spoken for. GPT image being pretty good does not mean image creation belongs to the big players, and the same holds in whichever industry you work in. Those of us who do not work at a frontier lab — the organic agents in the room — get to rethink any and every app as an AI-native system, from the boundary up. That is this whole talk one level higher: do not photocopy today's product categories onto tomorrow's substrate either.</a:t>
             </a:r>
             <a:endParaRPr lang="en-US" sz="1200"/>
           </a:p>
